--- a/report/figures/figure.pptx
+++ b/report/figures/figure.pptx
@@ -5,10 +5,11 @@
     <p:sldMasterId id="2147483648" r:id="rId1"/>
   </p:sldMasterIdLst>
   <p:notesMasterIdLst>
-    <p:notesMasterId r:id="rId3"/>
+    <p:notesMasterId r:id="rId4"/>
   </p:notesMasterIdLst>
   <p:sldIdLst>
     <p:sldId id="256" r:id="rId2"/>
+    <p:sldId id="257" r:id="rId3"/>
   </p:sldIdLst>
   <p:sldSz cx="12192000" cy="6858000"/>
   <p:notesSz cx="6858000" cy="9144000"/>
@@ -107,6 +108,11 @@
       </a:defRPr>
     </a:lvl9pPr>
   </p:defaultTextStyle>
+  <p:extLst>
+    <p:ext uri="{EFAFB233-063F-42B5-8137-9DF3F51BA10A}">
+      <p15:sldGuideLst xmlns:p15="http://schemas.microsoft.com/office/powerpoint/2012/main"/>
+    </p:ext>
+  </p:extLst>
 </p:presentation>
 </file>
 
@@ -192,7 +198,7 @@
           <a:p>
             <a:fld id="{8F1B2D63-1D76-3146-9BAC-EB046367107A}" type="datetimeFigureOut">
               <a:rPr kumimoji="1" lang="ja-JP" altLang="en-US" smtClean="0"/>
-              <a:t>2026/7/27</a:t>
+              <a:t>2026/7/28</a:t>
             </a:fld>
             <a:endParaRPr kumimoji="1" lang="ja-JP" altLang="en-US"/>
           </a:p>
@@ -722,7 +728,7 @@
           <a:p>
             <a:fld id="{0C73C2D9-ADBB-6349-903E-9DEEEC1DEE65}" type="datetimeFigureOut">
               <a:rPr kumimoji="1" lang="ja-JP" altLang="en-US" smtClean="0"/>
-              <a:t>2026/7/27</a:t>
+              <a:t>2026/7/28</a:t>
             </a:fld>
             <a:endParaRPr kumimoji="1" lang="ja-JP" altLang="en-US"/>
           </a:p>
@@ -952,7 +958,7 @@
           <a:p>
             <a:fld id="{0C73C2D9-ADBB-6349-903E-9DEEEC1DEE65}" type="datetimeFigureOut">
               <a:rPr kumimoji="1" lang="ja-JP" altLang="en-US" smtClean="0"/>
-              <a:t>2026/7/27</a:t>
+              <a:t>2026/7/28</a:t>
             </a:fld>
             <a:endParaRPr kumimoji="1" lang="ja-JP" altLang="en-US"/>
           </a:p>
@@ -1192,7 +1198,7 @@
           <a:p>
             <a:fld id="{0C73C2D9-ADBB-6349-903E-9DEEEC1DEE65}" type="datetimeFigureOut">
               <a:rPr kumimoji="1" lang="ja-JP" altLang="en-US" smtClean="0"/>
-              <a:t>2026/7/27</a:t>
+              <a:t>2026/7/28</a:t>
             </a:fld>
             <a:endParaRPr kumimoji="1" lang="ja-JP" altLang="en-US"/>
           </a:p>
@@ -1422,7 +1428,7 @@
           <a:p>
             <a:fld id="{0C73C2D9-ADBB-6349-903E-9DEEEC1DEE65}" type="datetimeFigureOut">
               <a:rPr kumimoji="1" lang="ja-JP" altLang="en-US" smtClean="0"/>
-              <a:t>2026/7/27</a:t>
+              <a:t>2026/7/28</a:t>
             </a:fld>
             <a:endParaRPr kumimoji="1" lang="ja-JP" altLang="en-US"/>
           </a:p>
@@ -1697,7 +1703,7 @@
           <a:p>
             <a:fld id="{0C73C2D9-ADBB-6349-903E-9DEEEC1DEE65}" type="datetimeFigureOut">
               <a:rPr kumimoji="1" lang="ja-JP" altLang="en-US" smtClean="0"/>
-              <a:t>2026/7/27</a:t>
+              <a:t>2026/7/28</a:t>
             </a:fld>
             <a:endParaRPr kumimoji="1" lang="ja-JP" altLang="en-US"/>
           </a:p>
@@ -2026,7 +2032,7 @@
           <a:p>
             <a:fld id="{0C73C2D9-ADBB-6349-903E-9DEEEC1DEE65}" type="datetimeFigureOut">
               <a:rPr kumimoji="1" lang="ja-JP" altLang="en-US" smtClean="0"/>
-              <a:t>2026/7/27</a:t>
+              <a:t>2026/7/28</a:t>
             </a:fld>
             <a:endParaRPr kumimoji="1" lang="ja-JP" altLang="en-US"/>
           </a:p>
@@ -2502,7 +2508,7 @@
           <a:p>
             <a:fld id="{0C73C2D9-ADBB-6349-903E-9DEEEC1DEE65}" type="datetimeFigureOut">
               <a:rPr kumimoji="1" lang="ja-JP" altLang="en-US" smtClean="0"/>
-              <a:t>2026/7/27</a:t>
+              <a:t>2026/7/28</a:t>
             </a:fld>
             <a:endParaRPr kumimoji="1" lang="ja-JP" altLang="en-US"/>
           </a:p>
@@ -2643,7 +2649,7 @@
           <a:p>
             <a:fld id="{0C73C2D9-ADBB-6349-903E-9DEEEC1DEE65}" type="datetimeFigureOut">
               <a:rPr kumimoji="1" lang="ja-JP" altLang="en-US" smtClean="0"/>
-              <a:t>2026/7/27</a:t>
+              <a:t>2026/7/28</a:t>
             </a:fld>
             <a:endParaRPr kumimoji="1" lang="ja-JP" altLang="en-US"/>
           </a:p>
@@ -2756,7 +2762,7 @@
           <a:p>
             <a:fld id="{0C73C2D9-ADBB-6349-903E-9DEEEC1DEE65}" type="datetimeFigureOut">
               <a:rPr kumimoji="1" lang="ja-JP" altLang="en-US" smtClean="0"/>
-              <a:t>2026/7/27</a:t>
+              <a:t>2026/7/28</a:t>
             </a:fld>
             <a:endParaRPr kumimoji="1" lang="ja-JP" altLang="en-US"/>
           </a:p>
@@ -3099,7 +3105,7 @@
           <a:p>
             <a:fld id="{0C73C2D9-ADBB-6349-903E-9DEEEC1DEE65}" type="datetimeFigureOut">
               <a:rPr kumimoji="1" lang="ja-JP" altLang="en-US" smtClean="0"/>
-              <a:t>2026/7/27</a:t>
+              <a:t>2026/7/28</a:t>
             </a:fld>
             <a:endParaRPr kumimoji="1" lang="ja-JP" altLang="en-US"/>
           </a:p>
@@ -3387,7 +3393,7 @@
           <a:p>
             <a:fld id="{0C73C2D9-ADBB-6349-903E-9DEEEC1DEE65}" type="datetimeFigureOut">
               <a:rPr kumimoji="1" lang="ja-JP" altLang="en-US" smtClean="0"/>
-              <a:t>2026/7/27</a:t>
+              <a:t>2026/7/28</a:t>
             </a:fld>
             <a:endParaRPr kumimoji="1" lang="ja-JP" altLang="en-US"/>
           </a:p>
@@ -3660,7 +3666,7 @@
           <a:p>
             <a:fld id="{0C73C2D9-ADBB-6349-903E-9DEEEC1DEE65}" type="datetimeFigureOut">
               <a:rPr kumimoji="1" lang="ja-JP" altLang="en-US" smtClean="0"/>
-              <a:t>2026/7/27</a:t>
+              <a:t>2026/7/28</a:t>
             </a:fld>
             <a:endParaRPr kumimoji="1" lang="ja-JP" altLang="en-US"/>
           </a:p>
@@ -4862,7 +4868,7 @@
             <a:pPr algn="ctr"/>
             <a:r>
               <a:rPr lang="en-US" altLang="ja-JP" dirty="0"/>
-              <a:t>(AR Glasses)</a:t>
+              <a:t>(MR Headset)</a:t>
             </a:r>
             <a:endParaRPr kumimoji="1" lang="ja-JP" altLang="en-US"/>
           </a:p>
@@ -5316,6 +5322,406 @@
     <p:extLst>
       <p:ext uri="{BB962C8B-B14F-4D97-AF65-F5344CB8AC3E}">
         <p14:creationId xmlns:p14="http://schemas.microsoft.com/office/powerpoint/2010/main" val="2067000984"/>
+      </p:ext>
+    </p:extLst>
+  </p:cSld>
+  <p:clrMapOvr>
+    <a:masterClrMapping/>
+  </p:clrMapOvr>
+</p:sld>
+</file>
+
+<file path=ppt/slides/slide2.xml><?xml version="1.0" encoding="utf-8"?>
+<p:sld xmlns:a="http://schemas.openxmlformats.org/drawingml/2006/main" xmlns:r="http://schemas.openxmlformats.org/officeDocument/2006/relationships" xmlns:p="http://schemas.openxmlformats.org/presentationml/2006/main">
+  <p:cSld>
+    <p:spTree>
+      <p:nvGrpSpPr>
+        <p:cNvPr id="1" name=""/>
+        <p:cNvGrpSpPr/>
+        <p:nvPr/>
+      </p:nvGrpSpPr>
+      <p:grpSpPr>
+        <a:xfrm>
+          <a:off x="0" y="0"/>
+          <a:ext cx="0" cy="0"/>
+          <a:chOff x="0" y="0"/>
+          <a:chExt cx="0" cy="0"/>
+        </a:xfrm>
+      </p:grpSpPr>
+      <p:pic>
+        <p:nvPicPr>
+          <p:cNvPr id="6" name="図 5">
+            <a:extLst>
+              <a:ext uri="{FF2B5EF4-FFF2-40B4-BE49-F238E27FC236}">
+                <a16:creationId xmlns:a16="http://schemas.microsoft.com/office/drawing/2014/main" id="{15EF22BD-CAD2-EE77-2476-35E34847CE43}"/>
+              </a:ext>
+            </a:extLst>
+          </p:cNvPr>
+          <p:cNvPicPr>
+            <a:picLocks noChangeAspect="1"/>
+          </p:cNvPicPr>
+          <p:nvPr/>
+        </p:nvPicPr>
+        <p:blipFill>
+          <a:blip r:embed="rId2"/>
+          <a:stretch>
+            <a:fillRect/>
+          </a:stretch>
+        </p:blipFill>
+        <p:spPr>
+          <a:xfrm>
+            <a:off x="652112" y="1786983"/>
+            <a:ext cx="4050450" cy="2278378"/>
+          </a:xfrm>
+          <a:prstGeom prst="rect">
+            <a:avLst/>
+          </a:prstGeom>
+        </p:spPr>
+      </p:pic>
+      <p:pic>
+        <p:nvPicPr>
+          <p:cNvPr id="9" name="図 8">
+            <a:extLst>
+              <a:ext uri="{FF2B5EF4-FFF2-40B4-BE49-F238E27FC236}">
+                <a16:creationId xmlns:a16="http://schemas.microsoft.com/office/drawing/2014/main" id="{745CAA63-779B-18E6-52BF-736EA7734744}"/>
+              </a:ext>
+            </a:extLst>
+          </p:cNvPr>
+          <p:cNvPicPr>
+            <a:picLocks noChangeAspect="1"/>
+          </p:cNvPicPr>
+          <p:nvPr/>
+        </p:nvPicPr>
+        <p:blipFill>
+          <a:blip r:embed="rId3"/>
+          <a:stretch>
+            <a:fillRect/>
+          </a:stretch>
+        </p:blipFill>
+        <p:spPr>
+          <a:xfrm>
+            <a:off x="4946159" y="1786983"/>
+            <a:ext cx="4050447" cy="2278378"/>
+          </a:xfrm>
+          <a:prstGeom prst="rect">
+            <a:avLst/>
+          </a:prstGeom>
+        </p:spPr>
+      </p:pic>
+      <p:pic>
+        <p:nvPicPr>
+          <p:cNvPr id="13" name="図 12">
+            <a:extLst>
+              <a:ext uri="{FF2B5EF4-FFF2-40B4-BE49-F238E27FC236}">
+                <a16:creationId xmlns:a16="http://schemas.microsoft.com/office/drawing/2014/main" id="{41CDE81E-ED48-0C13-8333-B813DB2D1FF3}"/>
+              </a:ext>
+            </a:extLst>
+          </p:cNvPr>
+          <p:cNvPicPr>
+            <a:picLocks noChangeAspect="1"/>
+          </p:cNvPicPr>
+          <p:nvPr/>
+        </p:nvPicPr>
+        <p:blipFill>
+          <a:blip r:embed="rId4"/>
+          <a:stretch>
+            <a:fillRect/>
+          </a:stretch>
+        </p:blipFill>
+        <p:spPr>
+          <a:xfrm>
+            <a:off x="9240203" y="1452771"/>
+            <a:ext cx="2532072" cy="1569241"/>
+          </a:xfrm>
+          <a:prstGeom prst="rect">
+            <a:avLst/>
+          </a:prstGeom>
+          <a:ln>
+            <a:solidFill>
+              <a:schemeClr val="tx1"/>
+            </a:solidFill>
+          </a:ln>
+        </p:spPr>
+      </p:pic>
+      <p:pic>
+        <p:nvPicPr>
+          <p:cNvPr id="17" name="図 16">
+            <a:extLst>
+              <a:ext uri="{FF2B5EF4-FFF2-40B4-BE49-F238E27FC236}">
+                <a16:creationId xmlns:a16="http://schemas.microsoft.com/office/drawing/2014/main" id="{ED11D9CD-C105-22D8-91A1-CD2BFCC6D53E}"/>
+              </a:ext>
+            </a:extLst>
+          </p:cNvPr>
+          <p:cNvPicPr>
+            <a:picLocks noChangeAspect="1"/>
+          </p:cNvPicPr>
+          <p:nvPr/>
+        </p:nvPicPr>
+        <p:blipFill>
+          <a:blip r:embed="rId5"/>
+          <a:stretch>
+            <a:fillRect/>
+          </a:stretch>
+        </p:blipFill>
+        <p:spPr>
+          <a:xfrm>
+            <a:off x="9240203" y="3098041"/>
+            <a:ext cx="2532072" cy="1353685"/>
+          </a:xfrm>
+          <a:prstGeom prst="rect">
+            <a:avLst/>
+          </a:prstGeom>
+          <a:ln>
+            <a:solidFill>
+              <a:schemeClr val="tx1"/>
+            </a:solidFill>
+          </a:ln>
+        </p:spPr>
+      </p:pic>
+      <p:sp>
+        <p:nvSpPr>
+          <p:cNvPr id="18" name="正方形/長方形 17">
+            <a:extLst>
+              <a:ext uri="{FF2B5EF4-FFF2-40B4-BE49-F238E27FC236}">
+                <a16:creationId xmlns:a16="http://schemas.microsoft.com/office/drawing/2014/main" id="{626E0819-F2DD-E6BA-3110-571CD858D2CF}"/>
+              </a:ext>
+            </a:extLst>
+          </p:cNvPr>
+          <p:cNvSpPr/>
+          <p:nvPr/>
+        </p:nvSpPr>
+        <p:spPr>
+          <a:xfrm>
+            <a:off x="652113" y="4688985"/>
+            <a:ext cx="4050446" cy="497611"/>
+          </a:xfrm>
+          <a:prstGeom prst="rect">
+            <a:avLst/>
+          </a:prstGeom>
+        </p:spPr>
+        <p:style>
+          <a:lnRef idx="2">
+            <a:schemeClr val="accent3">
+              <a:shade val="15000"/>
+            </a:schemeClr>
+          </a:lnRef>
+          <a:fillRef idx="1">
+            <a:schemeClr val="accent3"/>
+          </a:fillRef>
+          <a:effectRef idx="0">
+            <a:schemeClr val="accent3"/>
+          </a:effectRef>
+          <a:fontRef idx="minor">
+            <a:schemeClr val="lt1"/>
+          </a:fontRef>
+        </p:style>
+        <p:txBody>
+          <a:bodyPr rtlCol="0" anchor="ctr"/>
+          <a:lstStyle/>
+          <a:p>
+            <a:pPr algn="ctr"/>
+            <a:r>
+              <a:rPr kumimoji="1" lang="en-US" altLang="ja-JP" dirty="0"/>
+              <a:t>Input</a:t>
+            </a:r>
+            <a:endParaRPr kumimoji="1" lang="ja-JP" altLang="en-US"/>
+          </a:p>
+        </p:txBody>
+      </p:sp>
+      <p:sp>
+        <p:nvSpPr>
+          <p:cNvPr id="19" name="正方形/長方形 18">
+            <a:extLst>
+              <a:ext uri="{FF2B5EF4-FFF2-40B4-BE49-F238E27FC236}">
+                <a16:creationId xmlns:a16="http://schemas.microsoft.com/office/drawing/2014/main" id="{6391963B-BA48-A871-D822-503384993F7C}"/>
+              </a:ext>
+            </a:extLst>
+          </p:cNvPr>
+          <p:cNvSpPr/>
+          <p:nvPr/>
+        </p:nvSpPr>
+        <p:spPr>
+          <a:xfrm>
+            <a:off x="4946160" y="4688985"/>
+            <a:ext cx="4050447" cy="497611"/>
+          </a:xfrm>
+          <a:prstGeom prst="rect">
+            <a:avLst/>
+          </a:prstGeom>
+        </p:spPr>
+        <p:style>
+          <a:lnRef idx="2">
+            <a:schemeClr val="accent1">
+              <a:shade val="15000"/>
+            </a:schemeClr>
+          </a:lnRef>
+          <a:fillRef idx="1">
+            <a:schemeClr val="accent1"/>
+          </a:fillRef>
+          <a:effectRef idx="0">
+            <a:schemeClr val="accent1"/>
+          </a:effectRef>
+          <a:fontRef idx="minor">
+            <a:schemeClr val="lt1"/>
+          </a:fontRef>
+        </p:style>
+        <p:txBody>
+          <a:bodyPr rtlCol="0" anchor="ctr"/>
+          <a:lstStyle/>
+          <a:p>
+            <a:pPr algn="ctr"/>
+            <a:r>
+              <a:rPr lang="en-US" altLang="ja-JP" dirty="0"/>
+              <a:t>Processing (Estimate &amp; Evaluate)</a:t>
+            </a:r>
+            <a:endParaRPr kumimoji="1" lang="ja-JP" altLang="en-US"/>
+          </a:p>
+        </p:txBody>
+      </p:sp>
+      <p:sp>
+        <p:nvSpPr>
+          <p:cNvPr id="20" name="正方形/長方形 19">
+            <a:extLst>
+              <a:ext uri="{FF2B5EF4-FFF2-40B4-BE49-F238E27FC236}">
+                <a16:creationId xmlns:a16="http://schemas.microsoft.com/office/drawing/2014/main" id="{6D02B98F-25C1-3506-778B-9C0A3E8965C9}"/>
+              </a:ext>
+            </a:extLst>
+          </p:cNvPr>
+          <p:cNvSpPr/>
+          <p:nvPr/>
+        </p:nvSpPr>
+        <p:spPr>
+          <a:xfrm>
+            <a:off x="9240204" y="4688985"/>
+            <a:ext cx="2532072" cy="497611"/>
+          </a:xfrm>
+          <a:prstGeom prst="rect">
+            <a:avLst/>
+          </a:prstGeom>
+        </p:spPr>
+        <p:style>
+          <a:lnRef idx="2">
+            <a:schemeClr val="accent1"/>
+          </a:lnRef>
+          <a:fillRef idx="1">
+            <a:schemeClr val="lt1"/>
+          </a:fillRef>
+          <a:effectRef idx="0">
+            <a:schemeClr val="accent1"/>
+          </a:effectRef>
+          <a:fontRef idx="minor">
+            <a:schemeClr val="dk1"/>
+          </a:fontRef>
+        </p:style>
+        <p:txBody>
+          <a:bodyPr rtlCol="0" anchor="ctr"/>
+          <a:lstStyle/>
+          <a:p>
+            <a:pPr algn="ctr"/>
+            <a:r>
+              <a:rPr kumimoji="1" lang="en-US" altLang="ja-JP" dirty="0"/>
+              <a:t>Output</a:t>
+            </a:r>
+            <a:endParaRPr kumimoji="1" lang="ja-JP" altLang="en-US"/>
+          </a:p>
+        </p:txBody>
+      </p:sp>
+      <p:sp>
+        <p:nvSpPr>
+          <p:cNvPr id="21" name="右矢印 20">
+            <a:extLst>
+              <a:ext uri="{FF2B5EF4-FFF2-40B4-BE49-F238E27FC236}">
+                <a16:creationId xmlns:a16="http://schemas.microsoft.com/office/drawing/2014/main" id="{5708F4DB-52A6-E3F3-2C37-266FD189C217}"/>
+              </a:ext>
+            </a:extLst>
+          </p:cNvPr>
+          <p:cNvSpPr/>
+          <p:nvPr/>
+        </p:nvSpPr>
+        <p:spPr>
+          <a:xfrm>
+            <a:off x="4725123" y="2830478"/>
+            <a:ext cx="198475" cy="191388"/>
+          </a:xfrm>
+          <a:prstGeom prst="rightArrow">
+            <a:avLst/>
+          </a:prstGeom>
+        </p:spPr>
+        <p:style>
+          <a:lnRef idx="2">
+            <a:schemeClr val="accent3">
+              <a:shade val="15000"/>
+            </a:schemeClr>
+          </a:lnRef>
+          <a:fillRef idx="1">
+            <a:schemeClr val="accent3"/>
+          </a:fillRef>
+          <a:effectRef idx="0">
+            <a:schemeClr val="accent3"/>
+          </a:effectRef>
+          <a:fontRef idx="minor">
+            <a:schemeClr val="lt1"/>
+          </a:fontRef>
+        </p:style>
+        <p:txBody>
+          <a:bodyPr rtlCol="0" anchor="ctr"/>
+          <a:lstStyle/>
+          <a:p>
+            <a:pPr algn="ctr"/>
+            <a:endParaRPr kumimoji="1" lang="ja-JP" altLang="en-US"/>
+          </a:p>
+        </p:txBody>
+      </p:sp>
+      <p:sp>
+        <p:nvSpPr>
+          <p:cNvPr id="22" name="右矢印 21">
+            <a:extLst>
+              <a:ext uri="{FF2B5EF4-FFF2-40B4-BE49-F238E27FC236}">
+                <a16:creationId xmlns:a16="http://schemas.microsoft.com/office/drawing/2014/main" id="{AB6A963D-ADD5-882C-6979-F99F5F48E066}"/>
+              </a:ext>
+            </a:extLst>
+          </p:cNvPr>
+          <p:cNvSpPr/>
+          <p:nvPr/>
+        </p:nvSpPr>
+        <p:spPr>
+          <a:xfrm>
+            <a:off x="9019167" y="2830478"/>
+            <a:ext cx="198475" cy="191388"/>
+          </a:xfrm>
+          <a:prstGeom prst="rightArrow">
+            <a:avLst/>
+          </a:prstGeom>
+        </p:spPr>
+        <p:style>
+          <a:lnRef idx="2">
+            <a:schemeClr val="accent1">
+              <a:shade val="15000"/>
+            </a:schemeClr>
+          </a:lnRef>
+          <a:fillRef idx="1">
+            <a:schemeClr val="accent1"/>
+          </a:fillRef>
+          <a:effectRef idx="0">
+            <a:schemeClr val="accent1"/>
+          </a:effectRef>
+          <a:fontRef idx="minor">
+            <a:schemeClr val="lt1"/>
+          </a:fontRef>
+        </p:style>
+        <p:txBody>
+          <a:bodyPr rtlCol="0" anchor="ctr"/>
+          <a:lstStyle/>
+          <a:p>
+            <a:pPr algn="ctr"/>
+            <a:endParaRPr kumimoji="1" lang="ja-JP" altLang="en-US"/>
+          </a:p>
+        </p:txBody>
+      </p:sp>
+    </p:spTree>
+    <p:extLst>
+      <p:ext uri="{BB962C8B-B14F-4D97-AF65-F5344CB8AC3E}">
+        <p14:creationId xmlns:p14="http://schemas.microsoft.com/office/powerpoint/2010/main" val="592561439"/>
       </p:ext>
     </p:extLst>
   </p:cSld>
